--- a/class/cloud_infra_mgmt/04주차_Kubernetes개념/01_강의자료/1차시_K8s아키텍처개관.pptx
+++ b/class/cloud_infra_mgmt/04주차_Kubernetes개념/01_강의자료/1차시_K8s아키텍처개관.pptx
@@ -9366,7 +9366,7 @@
               </a:lnSpc>
             </a:pPr>
             <a:r>
-              <a:rPr sz="1500" b="1">
+              <a:rPr sz="1700" b="1">
                 <a:solidFill>
                   <a:srgbClr val="0D9488"/>
                 </a:solidFill>
@@ -9375,7 +9375,7 @@
               <a:t>●  </a:t>
             </a:r>
             <a:r>
-              <a:rPr sz="1500" b="0">
+              <a:rPr sz="1700" b="0">
                 <a:solidFill>
                   <a:srgbClr val="222733"/>
                 </a:solidFill>
@@ -9391,7 +9391,7 @@
               </a:lnSpc>
             </a:pPr>
             <a:r>
-              <a:rPr sz="1500" b="1">
+              <a:rPr sz="1700" b="1">
                 <a:solidFill>
                   <a:srgbClr val="0D9488"/>
                 </a:solidFill>
@@ -9400,7 +9400,7 @@
               <a:t>●  </a:t>
             </a:r>
             <a:r>
-              <a:rPr sz="1500" b="0">
+              <a:rPr sz="1700" b="0">
                 <a:solidFill>
                   <a:srgbClr val="222733"/>
                 </a:solidFill>
@@ -9416,7 +9416,7 @@
               </a:lnSpc>
             </a:pPr>
             <a:r>
-              <a:rPr sz="1500" b="1">
+              <a:rPr sz="1700" b="1">
                 <a:solidFill>
                   <a:srgbClr val="0D9488"/>
                 </a:solidFill>
@@ -9425,7 +9425,7 @@
               <a:t>●  </a:t>
             </a:r>
             <a:r>
-              <a:rPr sz="1500" b="0">
+              <a:rPr sz="1700" b="0">
                 <a:solidFill>
                   <a:srgbClr val="222733"/>
                 </a:solidFill>
@@ -9441,7 +9441,7 @@
               </a:lnSpc>
             </a:pPr>
             <a:r>
-              <a:rPr sz="1500" b="1">
+              <a:rPr sz="1700" b="1">
                 <a:solidFill>
                   <a:srgbClr val="0D9488"/>
                 </a:solidFill>
@@ -9450,7 +9450,7 @@
               <a:t>●  </a:t>
             </a:r>
             <a:r>
-              <a:rPr sz="1500" b="0">
+              <a:rPr sz="1700" b="0">
                 <a:solidFill>
                   <a:srgbClr val="222733"/>
                 </a:solidFill>

--- a/class/cloud_infra_mgmt/04주차_Kubernetes개념/01_강의자료/1차시_K8s아키텍처개관.pptx
+++ b/class/cloud_infra_mgmt/04주차_Kubernetes개념/01_강의자료/1차시_K8s아키텍처개관.pptx
@@ -5145,7 +5145,7 @@
           <a:p>
             <a:pPr>
               <a:lnSpc>
-                <a:spcPct val="115000"/>
+                <a:spcPct val="149500"/>
               </a:lnSpc>
             </a:pPr>
             <a:r>
@@ -5170,7 +5170,7 @@
           <a:p>
             <a:pPr>
               <a:lnSpc>
-                <a:spcPct val="115000"/>
+                <a:spcPct val="149500"/>
               </a:lnSpc>
             </a:pPr>
             <a:r>
@@ -5195,7 +5195,7 @@
           <a:p>
             <a:pPr>
               <a:lnSpc>
-                <a:spcPct val="115000"/>
+                <a:spcPct val="149500"/>
               </a:lnSpc>
             </a:pPr>
             <a:r>
@@ -5220,7 +5220,7 @@
           <a:p>
             <a:pPr>
               <a:lnSpc>
-                <a:spcPct val="115000"/>
+                <a:spcPct val="149500"/>
               </a:lnSpc>
             </a:pPr>
             <a:r>
@@ -6469,16 +6469,104 @@
       </p:sp>
       <p:sp>
         <p:nvSpPr>
-          <p:cNvPr id="7" name="Isosceles Triangle 6"/>
+          <p:cNvPr id="7" name="Rectangle 6"/>
           <p:cNvSpPr/>
           <p:nvPr/>
         </p:nvSpPr>
         <p:spPr>
-          <a:xfrm rot="5400000">
-            <a:off x="3495751" y="1673352"/>
-            <a:ext cx="146304" cy="146304"/>
-          </a:xfrm>
-          <a:prstGeom prst="triangle">
+          <a:xfrm>
+            <a:off x="5096865" y="1730959"/>
+            <a:ext cx="1995220" cy="31089"/>
+          </a:xfrm>
+          <a:prstGeom prst="rect">
+            <a:avLst/>
+          </a:prstGeom>
+          <a:solidFill>
+            <a:srgbClr val="14B8A6"/>
+          </a:solidFill>
+          <a:ln>
+            <a:noFill/>
+          </a:ln>
+          <a:effectLst/>
+        </p:spPr>
+        <p:style>
+          <a:lnRef idx="1">
+            <a:schemeClr val="accent1"/>
+          </a:lnRef>
+          <a:fillRef idx="3">
+            <a:schemeClr val="accent1"/>
+          </a:fillRef>
+          <a:effectRef idx="2">
+            <a:schemeClr val="accent1"/>
+          </a:effectRef>
+          <a:fontRef idx="minor">
+            <a:schemeClr val="lt1"/>
+          </a:fontRef>
+        </p:style>
+        <p:txBody>
+          <a:bodyPr rtlCol="0" anchor="ctr"/>
+          <a:lstStyle/>
+          <a:p>
+            <a:pPr algn="ctr"/>
+          </a:p>
+        </p:txBody>
+      </p:sp>
+      <p:sp>
+        <p:nvSpPr>
+          <p:cNvPr id="8" name="Rectangle 7"/>
+          <p:cNvSpPr/>
+          <p:nvPr/>
+        </p:nvSpPr>
+        <p:spPr>
+          <a:xfrm>
+            <a:off x="7622438" y="1730959"/>
+            <a:ext cx="1995220" cy="31089"/>
+          </a:xfrm>
+          <a:prstGeom prst="rect">
+            <a:avLst/>
+          </a:prstGeom>
+          <a:solidFill>
+            <a:srgbClr val="14B8A6"/>
+          </a:solidFill>
+          <a:ln>
+            <a:noFill/>
+          </a:ln>
+          <a:effectLst/>
+        </p:spPr>
+        <p:style>
+          <a:lnRef idx="1">
+            <a:schemeClr val="accent1"/>
+          </a:lnRef>
+          <a:fillRef idx="3">
+            <a:schemeClr val="accent1"/>
+          </a:fillRef>
+          <a:effectRef idx="2">
+            <a:schemeClr val="accent1"/>
+          </a:effectRef>
+          <a:fontRef idx="minor">
+            <a:schemeClr val="lt1"/>
+          </a:fontRef>
+        </p:style>
+        <p:txBody>
+          <a:bodyPr rtlCol="0" anchor="ctr"/>
+          <a:lstStyle/>
+          <a:p>
+            <a:pPr algn="ctr"/>
+          </a:p>
+        </p:txBody>
+      </p:sp>
+      <p:sp>
+        <p:nvSpPr>
+          <p:cNvPr id="9" name="Oval 8"/>
+          <p:cNvSpPr/>
+          <p:nvPr/>
+        </p:nvSpPr>
+        <p:spPr>
+          <a:xfrm>
+            <a:off x="2040940" y="1481328"/>
+            <a:ext cx="530352" cy="530352"/>
+          </a:xfrm>
+          <a:prstGeom prst="ellipse">
             <a:avLst/>
           </a:prstGeom>
           <a:solidFill>
@@ -6513,227 +6601,7 @@
       </p:sp>
       <p:sp>
         <p:nvSpPr>
-          <p:cNvPr id="8" name="Rectangle 7"/>
-          <p:cNvSpPr/>
-          <p:nvPr/>
-        </p:nvSpPr>
-        <p:spPr>
-          <a:xfrm>
-            <a:off x="5096865" y="1730959"/>
-            <a:ext cx="1995220" cy="31089"/>
-          </a:xfrm>
-          <a:prstGeom prst="rect">
-            <a:avLst/>
-          </a:prstGeom>
-          <a:solidFill>
-            <a:srgbClr val="14B8A6"/>
-          </a:solidFill>
-          <a:ln>
-            <a:noFill/>
-          </a:ln>
-          <a:effectLst/>
-        </p:spPr>
-        <p:style>
-          <a:lnRef idx="1">
-            <a:schemeClr val="accent1"/>
-          </a:lnRef>
-          <a:fillRef idx="3">
-            <a:schemeClr val="accent1"/>
-          </a:fillRef>
-          <a:effectRef idx="2">
-            <a:schemeClr val="accent1"/>
-          </a:effectRef>
-          <a:fontRef idx="minor">
-            <a:schemeClr val="lt1"/>
-          </a:fontRef>
-        </p:style>
-        <p:txBody>
-          <a:bodyPr rtlCol="0" anchor="ctr"/>
-          <a:lstStyle/>
-          <a:p>
-            <a:pPr algn="ctr"/>
-          </a:p>
-        </p:txBody>
-      </p:sp>
-      <p:sp>
-        <p:nvSpPr>
-          <p:cNvPr id="9" name="Isosceles Triangle 8"/>
-          <p:cNvSpPr/>
-          <p:nvPr/>
-        </p:nvSpPr>
-        <p:spPr>
-          <a:xfrm rot="5400000">
-            <a:off x="6021324" y="1673352"/>
-            <a:ext cx="146304" cy="146304"/>
-          </a:xfrm>
-          <a:prstGeom prst="triangle">
-            <a:avLst/>
-          </a:prstGeom>
-          <a:solidFill>
-            <a:srgbClr val="0D9488"/>
-          </a:solidFill>
-          <a:ln>
-            <a:noFill/>
-          </a:ln>
-          <a:effectLst/>
-        </p:spPr>
-        <p:style>
-          <a:lnRef idx="1">
-            <a:schemeClr val="accent1"/>
-          </a:lnRef>
-          <a:fillRef idx="3">
-            <a:schemeClr val="accent1"/>
-          </a:fillRef>
-          <a:effectRef idx="2">
-            <a:schemeClr val="accent1"/>
-          </a:effectRef>
-          <a:fontRef idx="minor">
-            <a:schemeClr val="lt1"/>
-          </a:fontRef>
-        </p:style>
-        <p:txBody>
-          <a:bodyPr rtlCol="0" anchor="ctr"/>
-          <a:lstStyle/>
-          <a:p>
-            <a:pPr algn="ctr"/>
-          </a:p>
-        </p:txBody>
-      </p:sp>
-      <p:sp>
-        <p:nvSpPr>
-          <p:cNvPr id="10" name="Rectangle 9"/>
-          <p:cNvSpPr/>
-          <p:nvPr/>
-        </p:nvSpPr>
-        <p:spPr>
-          <a:xfrm>
-            <a:off x="7622438" y="1730959"/>
-            <a:ext cx="1995220" cy="31089"/>
-          </a:xfrm>
-          <a:prstGeom prst="rect">
-            <a:avLst/>
-          </a:prstGeom>
-          <a:solidFill>
-            <a:srgbClr val="14B8A6"/>
-          </a:solidFill>
-          <a:ln>
-            <a:noFill/>
-          </a:ln>
-          <a:effectLst/>
-        </p:spPr>
-        <p:style>
-          <a:lnRef idx="1">
-            <a:schemeClr val="accent1"/>
-          </a:lnRef>
-          <a:fillRef idx="3">
-            <a:schemeClr val="accent1"/>
-          </a:fillRef>
-          <a:effectRef idx="2">
-            <a:schemeClr val="accent1"/>
-          </a:effectRef>
-          <a:fontRef idx="minor">
-            <a:schemeClr val="lt1"/>
-          </a:fontRef>
-        </p:style>
-        <p:txBody>
-          <a:bodyPr rtlCol="0" anchor="ctr"/>
-          <a:lstStyle/>
-          <a:p>
-            <a:pPr algn="ctr"/>
-          </a:p>
-        </p:txBody>
-      </p:sp>
-      <p:sp>
-        <p:nvSpPr>
-          <p:cNvPr id="11" name="Isosceles Triangle 10"/>
-          <p:cNvSpPr/>
-          <p:nvPr/>
-        </p:nvSpPr>
-        <p:spPr>
-          <a:xfrm rot="5400000">
-            <a:off x="8546896" y="1673352"/>
-            <a:ext cx="146304" cy="146304"/>
-          </a:xfrm>
-          <a:prstGeom prst="triangle">
-            <a:avLst/>
-          </a:prstGeom>
-          <a:solidFill>
-            <a:srgbClr val="0D9488"/>
-          </a:solidFill>
-          <a:ln>
-            <a:noFill/>
-          </a:ln>
-          <a:effectLst/>
-        </p:spPr>
-        <p:style>
-          <a:lnRef idx="1">
-            <a:schemeClr val="accent1"/>
-          </a:lnRef>
-          <a:fillRef idx="3">
-            <a:schemeClr val="accent1"/>
-          </a:fillRef>
-          <a:effectRef idx="2">
-            <a:schemeClr val="accent1"/>
-          </a:effectRef>
-          <a:fontRef idx="minor">
-            <a:schemeClr val="lt1"/>
-          </a:fontRef>
-        </p:style>
-        <p:txBody>
-          <a:bodyPr rtlCol="0" anchor="ctr"/>
-          <a:lstStyle/>
-          <a:p>
-            <a:pPr algn="ctr"/>
-          </a:p>
-        </p:txBody>
-      </p:sp>
-      <p:sp>
-        <p:nvSpPr>
-          <p:cNvPr id="12" name="Oval 11"/>
-          <p:cNvSpPr/>
-          <p:nvPr/>
-        </p:nvSpPr>
-        <p:spPr>
-          <a:xfrm>
-            <a:off x="2040940" y="1481328"/>
-            <a:ext cx="530352" cy="530352"/>
-          </a:xfrm>
-          <a:prstGeom prst="ellipse">
-            <a:avLst/>
-          </a:prstGeom>
-          <a:solidFill>
-            <a:srgbClr val="0D9488"/>
-          </a:solidFill>
-          <a:ln>
-            <a:noFill/>
-          </a:ln>
-          <a:effectLst/>
-        </p:spPr>
-        <p:style>
-          <a:lnRef idx="1">
-            <a:schemeClr val="accent1"/>
-          </a:lnRef>
-          <a:fillRef idx="3">
-            <a:schemeClr val="accent1"/>
-          </a:fillRef>
-          <a:effectRef idx="2">
-            <a:schemeClr val="accent1"/>
-          </a:effectRef>
-          <a:fontRef idx="minor">
-            <a:schemeClr val="lt1"/>
-          </a:fontRef>
-        </p:style>
-        <p:txBody>
-          <a:bodyPr rtlCol="0" anchor="ctr"/>
-          <a:lstStyle/>
-          <a:p>
-            <a:pPr algn="ctr"/>
-          </a:p>
-        </p:txBody>
-      </p:sp>
-      <p:sp>
-        <p:nvSpPr>
-          <p:cNvPr id="13" name="TextBox 12"/>
+          <p:cNvPr id="10" name="TextBox 9"/>
           <p:cNvSpPr txBox="1"/>
           <p:nvPr/>
         </p:nvSpPr>
@@ -6768,7 +6636,7 @@
       </p:sp>
       <p:sp>
         <p:nvSpPr>
-          <p:cNvPr id="14" name="Rounded Rectangle 13"/>
+          <p:cNvPr id="11" name="Rounded Rectangle 10"/>
           <p:cNvSpPr/>
           <p:nvPr/>
         </p:nvSpPr>
@@ -6816,7 +6684,7 @@
       </p:sp>
       <p:sp>
         <p:nvSpPr>
-          <p:cNvPr id="15" name="TextBox 14"/>
+          <p:cNvPr id="12" name="TextBox 11"/>
           <p:cNvSpPr txBox="1"/>
           <p:nvPr/>
         </p:nvSpPr>
@@ -6851,7 +6719,7 @@
       </p:sp>
       <p:sp>
         <p:nvSpPr>
-          <p:cNvPr id="16" name="TextBox 15"/>
+          <p:cNvPr id="13" name="TextBox 12"/>
           <p:cNvSpPr txBox="1"/>
           <p:nvPr/>
         </p:nvSpPr>
@@ -6890,7 +6758,7 @@
       </p:sp>
       <p:sp>
         <p:nvSpPr>
-          <p:cNvPr id="17" name="Oval 16"/>
+          <p:cNvPr id="14" name="Oval 13"/>
           <p:cNvSpPr/>
           <p:nvPr/>
         </p:nvSpPr>
@@ -6934,7 +6802,7 @@
       </p:sp>
       <p:sp>
         <p:nvSpPr>
-          <p:cNvPr id="18" name="TextBox 17"/>
+          <p:cNvPr id="15" name="TextBox 14"/>
           <p:cNvSpPr txBox="1"/>
           <p:nvPr/>
         </p:nvSpPr>
@@ -6969,7 +6837,7 @@
       </p:sp>
       <p:sp>
         <p:nvSpPr>
-          <p:cNvPr id="19" name="Rounded Rectangle 18"/>
+          <p:cNvPr id="16" name="Rounded Rectangle 15"/>
           <p:cNvSpPr/>
           <p:nvPr/>
         </p:nvSpPr>
@@ -7017,7 +6885,7 @@
       </p:sp>
       <p:sp>
         <p:nvSpPr>
-          <p:cNvPr id="20" name="TextBox 19"/>
+          <p:cNvPr id="17" name="TextBox 16"/>
           <p:cNvSpPr txBox="1"/>
           <p:nvPr/>
         </p:nvSpPr>
@@ -7052,7 +6920,7 @@
       </p:sp>
       <p:sp>
         <p:nvSpPr>
-          <p:cNvPr id="21" name="TextBox 20"/>
+          <p:cNvPr id="18" name="TextBox 17"/>
           <p:cNvSpPr txBox="1"/>
           <p:nvPr/>
         </p:nvSpPr>
@@ -7091,7 +6959,7 @@
       </p:sp>
       <p:sp>
         <p:nvSpPr>
-          <p:cNvPr id="22" name="Oval 21"/>
+          <p:cNvPr id="19" name="Oval 18"/>
           <p:cNvSpPr/>
           <p:nvPr/>
         </p:nvSpPr>
@@ -7135,7 +7003,7 @@
       </p:sp>
       <p:sp>
         <p:nvSpPr>
-          <p:cNvPr id="23" name="TextBox 22"/>
+          <p:cNvPr id="20" name="TextBox 19"/>
           <p:cNvSpPr txBox="1"/>
           <p:nvPr/>
         </p:nvSpPr>
@@ -7170,7 +7038,7 @@
       </p:sp>
       <p:sp>
         <p:nvSpPr>
-          <p:cNvPr id="24" name="Rounded Rectangle 23"/>
+          <p:cNvPr id="21" name="Rounded Rectangle 20"/>
           <p:cNvSpPr/>
           <p:nvPr/>
         </p:nvSpPr>
@@ -7218,7 +7086,7 @@
       </p:sp>
       <p:sp>
         <p:nvSpPr>
-          <p:cNvPr id="25" name="TextBox 24"/>
+          <p:cNvPr id="22" name="TextBox 21"/>
           <p:cNvSpPr txBox="1"/>
           <p:nvPr/>
         </p:nvSpPr>
@@ -7253,7 +7121,7 @@
       </p:sp>
       <p:sp>
         <p:nvSpPr>
-          <p:cNvPr id="26" name="TextBox 25"/>
+          <p:cNvPr id="23" name="TextBox 22"/>
           <p:cNvSpPr txBox="1"/>
           <p:nvPr/>
         </p:nvSpPr>
@@ -7292,7 +7160,7 @@
       </p:sp>
       <p:sp>
         <p:nvSpPr>
-          <p:cNvPr id="27" name="Oval 26"/>
+          <p:cNvPr id="24" name="Oval 23"/>
           <p:cNvSpPr/>
           <p:nvPr/>
         </p:nvSpPr>
@@ -7336,7 +7204,7 @@
       </p:sp>
       <p:sp>
         <p:nvSpPr>
-          <p:cNvPr id="28" name="TextBox 27"/>
+          <p:cNvPr id="25" name="TextBox 24"/>
           <p:cNvSpPr txBox="1"/>
           <p:nvPr/>
         </p:nvSpPr>
@@ -7371,7 +7239,7 @@
       </p:sp>
       <p:sp>
         <p:nvSpPr>
-          <p:cNvPr id="29" name="Rounded Rectangle 28"/>
+          <p:cNvPr id="26" name="Rounded Rectangle 25"/>
           <p:cNvSpPr/>
           <p:nvPr/>
         </p:nvSpPr>
@@ -7419,7 +7287,7 @@
       </p:sp>
       <p:sp>
         <p:nvSpPr>
-          <p:cNvPr id="30" name="TextBox 29"/>
+          <p:cNvPr id="27" name="TextBox 26"/>
           <p:cNvSpPr txBox="1"/>
           <p:nvPr/>
         </p:nvSpPr>
@@ -7454,7 +7322,7 @@
       </p:sp>
       <p:sp>
         <p:nvSpPr>
-          <p:cNvPr id="31" name="TextBox 30"/>
+          <p:cNvPr id="28" name="TextBox 27"/>
           <p:cNvSpPr txBox="1"/>
           <p:nvPr/>
         </p:nvSpPr>
@@ -7493,7 +7361,7 @@
       </p:sp>
       <p:sp>
         <p:nvSpPr>
-          <p:cNvPr id="32" name="TextBox 31"/>
+          <p:cNvPr id="29" name="TextBox 28"/>
           <p:cNvSpPr txBox="1"/>
           <p:nvPr/>
         </p:nvSpPr>
@@ -7528,7 +7396,7 @@
       </p:sp>
       <p:sp>
         <p:nvSpPr>
-          <p:cNvPr id="33" name="TextBox 32"/>
+          <p:cNvPr id="30" name="TextBox 29"/>
           <p:cNvSpPr txBox="1"/>
           <p:nvPr/>
         </p:nvSpPr>
@@ -7563,7 +7431,7 @@
       </p:sp>
       <p:sp>
         <p:nvSpPr>
-          <p:cNvPr id="34" name="Rectangle 33"/>
+          <p:cNvPr id="31" name="Rectangle 30"/>
           <p:cNvSpPr/>
           <p:nvPr/>
         </p:nvSpPr>
@@ -8087,7 +7955,7 @@
           <a:p>
             <a:pPr>
               <a:lnSpc>
-                <a:spcPct val="115000"/>
+                <a:spcPct val="149500"/>
               </a:lnSpc>
             </a:pPr>
             <a:r>
@@ -8112,7 +7980,7 @@
           <a:p>
             <a:pPr>
               <a:lnSpc>
-                <a:spcPct val="115000"/>
+                <a:spcPct val="149500"/>
               </a:lnSpc>
             </a:pPr>
             <a:r>
@@ -8137,7 +8005,7 @@
           <a:p>
             <a:pPr>
               <a:lnSpc>
-                <a:spcPct val="115000"/>
+                <a:spcPct val="149500"/>
               </a:lnSpc>
             </a:pPr>
             <a:r>
@@ -8162,7 +8030,7 @@
           <a:p>
             <a:pPr>
               <a:lnSpc>
-                <a:spcPct val="115000"/>
+                <a:spcPct val="149500"/>
               </a:lnSpc>
             </a:pPr>
             <a:r>
@@ -8667,7 +8535,7 @@
           <a:p>
             <a:pPr>
               <a:lnSpc>
-                <a:spcPct val="115000"/>
+                <a:spcPct val="149500"/>
               </a:lnSpc>
             </a:pPr>
             <a:r>
@@ -8692,7 +8560,7 @@
           <a:p>
             <a:pPr>
               <a:lnSpc>
-                <a:spcPct val="115000"/>
+                <a:spcPct val="149500"/>
               </a:lnSpc>
             </a:pPr>
             <a:r>
@@ -8717,7 +8585,7 @@
           <a:p>
             <a:pPr>
               <a:lnSpc>
-                <a:spcPct val="115000"/>
+                <a:spcPct val="149500"/>
               </a:lnSpc>
             </a:pPr>
             <a:r>
@@ -8742,7 +8610,7 @@
           <a:p>
             <a:pPr>
               <a:lnSpc>
-                <a:spcPct val="115000"/>
+                <a:spcPct val="149500"/>
               </a:lnSpc>
             </a:pPr>
             <a:r>
@@ -9362,7 +9230,7 @@
           <a:p>
             <a:pPr>
               <a:lnSpc>
-                <a:spcPct val="115000"/>
+                <a:spcPct val="149500"/>
               </a:lnSpc>
             </a:pPr>
             <a:r>
@@ -9387,7 +9255,7 @@
           <a:p>
             <a:pPr>
               <a:lnSpc>
-                <a:spcPct val="115000"/>
+                <a:spcPct val="149500"/>
               </a:lnSpc>
             </a:pPr>
             <a:r>
@@ -9412,7 +9280,7 @@
           <a:p>
             <a:pPr>
               <a:lnSpc>
-                <a:spcPct val="115000"/>
+                <a:spcPct val="149500"/>
               </a:lnSpc>
             </a:pPr>
             <a:r>
@@ -9437,7 +9305,7 @@
           <a:p>
             <a:pPr>
               <a:lnSpc>
-                <a:spcPct val="115000"/>
+                <a:spcPct val="149500"/>
               </a:lnSpc>
             </a:pPr>
             <a:r>
@@ -10100,7 +9968,7 @@
           <a:p>
             <a:pPr>
               <a:lnSpc>
-                <a:spcPct val="115000"/>
+                <a:spcPct val="149500"/>
               </a:lnSpc>
             </a:pPr>
             <a:r>
@@ -10125,7 +9993,7 @@
           <a:p>
             <a:pPr>
               <a:lnSpc>
-                <a:spcPct val="115000"/>
+                <a:spcPct val="149500"/>
               </a:lnSpc>
             </a:pPr>
             <a:r>
@@ -10150,7 +10018,7 @@
           <a:p>
             <a:pPr>
               <a:lnSpc>
-                <a:spcPct val="115000"/>
+                <a:spcPct val="149500"/>
               </a:lnSpc>
             </a:pPr>
             <a:r>
@@ -10175,7 +10043,7 @@
           <a:p>
             <a:pPr>
               <a:lnSpc>
-                <a:spcPct val="115000"/>
+                <a:spcPct val="149500"/>
               </a:lnSpc>
             </a:pPr>
             <a:r>

--- a/class/cloud_infra_mgmt/04주차_Kubernetes개념/01_강의자료/1차시_K8s아키텍처개관.pptx
+++ b/class/cloud_infra_mgmt/04주차_Kubernetes개념/01_강의자료/1차시_K8s아키텍처개관.pptx
@@ -4781,6 +4781,8 @@
                   <a:srgbClr val="14B8A6"/>
                 </a:solidFill>
                 <a:latin typeface="맑은 고딕"/>
+                <a:ea typeface="맑은 고딕"/>
+                <a:cs typeface="맑은 고딕"/>
               </a:rPr>
               <a:t>클라우드인프라관리  ·  4주차 1차시</a:t>
             </a:r>
@@ -4816,6 +4818,8 @@
                   <a:srgbClr val="FFFFFF"/>
                 </a:solidFill>
                 <a:latin typeface="맑은 고딕"/>
+                <a:ea typeface="맑은 고딕"/>
+                <a:cs typeface="맑은 고딕"/>
               </a:rPr>
               <a:t>Kubernetes, 왜 필요한가</a:t>
             </a:r>
@@ -4851,6 +4855,8 @@
                   <a:srgbClr val="C9D3E6"/>
                 </a:solidFill>
                 <a:latin typeface="맑은 고딕"/>
+                <a:ea typeface="맑은 고딕"/>
+                <a:cs typeface="맑은 고딕"/>
               </a:rPr>
               <a:t>오케스트레이션 개념과 아키텍처 개관</a:t>
             </a:r>
@@ -4886,6 +4892,8 @@
                   <a:srgbClr val="FFFFFF"/>
                 </a:solidFill>
                 <a:latin typeface="맑은 고딕"/>
+                <a:ea typeface="맑은 고딕"/>
+                <a:cs typeface="맑은 고딕"/>
               </a:rPr>
               <a:t>영남이공대학교 김지윤교수</a:t>
             </a:r>
@@ -5045,6 +5053,8 @@
                   <a:srgbClr val="14213D"/>
                 </a:solidFill>
                 <a:latin typeface="맑은 고딕"/>
+                <a:ea typeface="맑은 고딕"/>
+                <a:cs typeface="맑은 고딕"/>
               </a:rPr>
               <a:t>03</a:t>
             </a:r>
@@ -5080,6 +5090,8 @@
                   <a:srgbClr val="14B8A6"/>
                 </a:solidFill>
                 <a:latin typeface="맑은 고딕"/>
+                <a:ea typeface="맑은 고딕"/>
+                <a:cs typeface="맑은 고딕"/>
               </a:rPr>
               <a:t>실습 안내</a:t>
             </a:r>
@@ -5115,6 +5127,8 @@
                   <a:srgbClr val="FFFFFF"/>
                 </a:solidFill>
                 <a:latin typeface="맑은 고딕"/>
+                <a:ea typeface="맑은 고딕"/>
+                <a:cs typeface="맑은 고딕"/>
               </a:rPr>
               <a:t>VM 안내 — minikube 기동 (설치 완료 상태)</a:t>
             </a:r>
@@ -5154,6 +5168,8 @@
                   <a:srgbClr val="0D9488"/>
                 </a:solidFill>
                 <a:latin typeface="맑은 고딕"/>
+                <a:ea typeface="맑은 고딕"/>
+                <a:cs typeface="맑은 고딕"/>
               </a:rPr>
               <a:t>●  </a:t>
             </a:r>
@@ -5163,6 +5179,8 @@
                   <a:srgbClr val="222733"/>
                 </a:solidFill>
                 <a:latin typeface="맑은 고딕"/>
+                <a:ea typeface="맑은 고딕"/>
+                <a:cs typeface="맑은 고딕"/>
               </a:rPr>
               <a:t>개인 VM(cloud-lab)에는 minikube가 이미 설치되어 있음 (별도 설치 불필요)</a:t>
             </a:r>
@@ -5179,6 +5197,8 @@
                   <a:srgbClr val="0D9488"/>
                 </a:solidFill>
                 <a:latin typeface="맑은 고딕"/>
+                <a:ea typeface="맑은 고딕"/>
+                <a:cs typeface="맑은 고딕"/>
               </a:rPr>
               <a:t>●  </a:t>
             </a:r>
@@ -5188,6 +5208,8 @@
                   <a:srgbClr val="222733"/>
                 </a:solidFill>
                 <a:latin typeface="맑은 고딕"/>
+                <a:ea typeface="맑은 고딕"/>
+                <a:cs typeface="맑은 고딕"/>
               </a:rPr>
               <a:t>minikube start  — 로컬 1노드 클러스터 기동 (첫 실행은 1~2분 소요될 수 있음)</a:t>
             </a:r>
@@ -5204,6 +5226,8 @@
                   <a:srgbClr val="0D9488"/>
                 </a:solidFill>
                 <a:latin typeface="맑은 고딕"/>
+                <a:ea typeface="맑은 고딕"/>
+                <a:cs typeface="맑은 고딕"/>
               </a:rPr>
               <a:t>●  </a:t>
             </a:r>
@@ -5213,6 +5237,8 @@
                   <a:srgbClr val="222733"/>
                 </a:solidFill>
                 <a:latin typeface="맑은 고딕"/>
+                <a:ea typeface="맑은 고딕"/>
+                <a:cs typeface="맑은 고딕"/>
               </a:rPr>
               <a:t>kubectl get nodes  — Ready 상태 확인</a:t>
             </a:r>
@@ -5229,6 +5255,8 @@
                   <a:srgbClr val="0D9488"/>
                 </a:solidFill>
                 <a:latin typeface="맑은 고딕"/>
+                <a:ea typeface="맑은 고딕"/>
+                <a:cs typeface="맑은 고딕"/>
               </a:rPr>
               <a:t>●  </a:t>
             </a:r>
@@ -5238,6 +5266,8 @@
                   <a:srgbClr val="222733"/>
                 </a:solidFill>
                 <a:latin typeface="맑은 고딕"/>
+                <a:ea typeface="맑은 고딕"/>
+                <a:cs typeface="맑은 고딕"/>
               </a:rPr>
               <a:t>다음 차시부터 이 클러스터를 계속 사용하니 minikube start만 미리 해두기</a:t>
             </a:r>
@@ -5273,6 +5303,8 @@
                   <a:srgbClr val="5B6373"/>
                 </a:solidFill>
                 <a:latin typeface="맑은 고딕"/>
+                <a:ea typeface="맑은 고딕"/>
+                <a:cs typeface="맑은 고딕"/>
               </a:rPr>
               <a:t>클라우드인프라관리  ·  4주차 1차시</a:t>
             </a:r>
@@ -5308,6 +5340,8 @@
                   <a:srgbClr val="5B6373"/>
                 </a:solidFill>
                 <a:latin typeface="맑은 고딕"/>
+                <a:ea typeface="맑은 고딕"/>
+                <a:cs typeface="맑은 고딕"/>
               </a:rPr>
               <a:t>10 / 12</a:t>
             </a:r>
@@ -5493,6 +5527,8 @@
                   <a:srgbClr val="FFFFFF"/>
                 </a:solidFill>
                 <a:latin typeface="맑은 고딕"/>
+                <a:ea typeface="맑은 고딕"/>
+                <a:cs typeface="맑은 고딕"/>
               </a:rPr>
               <a:t>오늘의 정리</a:t>
             </a:r>
@@ -5546,6 +5582,8 @@
                   <a:srgbClr val="14213D"/>
                 </a:solidFill>
                 <a:latin typeface="맑은 고딕"/>
+                <a:ea typeface="맑은 고딕"/>
+                <a:cs typeface="맑은 고딕"/>
               </a:rPr>
               <a:t>1</a:t>
             </a:r>
@@ -5581,6 +5619,8 @@
                   <a:srgbClr val="FFFFFF"/>
                 </a:solidFill>
                 <a:latin typeface="맑은 고딕"/>
+                <a:ea typeface="맑은 고딕"/>
+                <a:cs typeface="맑은 고딕"/>
               </a:rPr>
               <a:t>K8s = 컨테이너를 자동으로 배포·관리해주는 오케스트레이션 도구</a:t>
             </a:r>
@@ -5634,6 +5674,8 @@
                   <a:srgbClr val="14213D"/>
                 </a:solidFill>
                 <a:latin typeface="맑은 고딕"/>
+                <a:ea typeface="맑은 고딕"/>
+                <a:cs typeface="맑은 고딕"/>
               </a:rPr>
               <a:t>2</a:t>
             </a:r>
@@ -5669,6 +5711,8 @@
                   <a:srgbClr val="FFFFFF"/>
                 </a:solidFill>
                 <a:latin typeface="맑은 고딕"/>
+                <a:ea typeface="맑은 고딕"/>
+                <a:cs typeface="맑은 고딕"/>
               </a:rPr>
               <a:t>클러스터 = Control Plane(두뇌) + Worker Node(일꾼)</a:t>
             </a:r>
@@ -5810,6 +5854,8 @@
                   <a:srgbClr val="FFFFFF"/>
                 </a:solidFill>
                 <a:latin typeface="맑은 고딕"/>
+                <a:ea typeface="맑은 고딕"/>
+                <a:cs typeface="맑은 고딕"/>
               </a:rPr>
               <a:t>다음 차시 예고</a:t>
             </a:r>
@@ -5845,6 +5891,8 @@
                   <a:srgbClr val="14B8A6"/>
                 </a:solidFill>
                 <a:latin typeface="맑은 고딕"/>
+                <a:ea typeface="맑은 고딕"/>
+                <a:cs typeface="맑은 고딕"/>
               </a:rPr>
               <a:t>다음 차시 예고 — 4주차 2차시</a:t>
             </a:r>
@@ -5880,6 +5928,8 @@
                   <a:srgbClr val="FFFFFF"/>
                 </a:solidFill>
                 <a:latin typeface="맑은 고딕"/>
+                <a:ea typeface="맑은 고딕"/>
+                <a:cs typeface="맑은 고딕"/>
               </a:rPr>
               <a:t>K8s에서 가장 작은 배포 단위인 Pod 개념을 배우고, 첫 Pod를 직접 실행해봅니다.</a:t>
             </a:r>
@@ -6021,6 +6071,8 @@
                   <a:srgbClr val="14B8A6"/>
                 </a:solidFill>
                 <a:latin typeface="맑은 고딕"/>
+                <a:ea typeface="맑은 고딕"/>
+                <a:cs typeface="맑은 고딕"/>
               </a:rPr>
               <a:t>SESSION OVERVIEW</a:t>
             </a:r>
@@ -6056,6 +6108,8 @@
                   <a:srgbClr val="FFFFFF"/>
                 </a:solidFill>
                 <a:latin typeface="맑은 고딕"/>
+                <a:ea typeface="맑은 고딕"/>
+                <a:cs typeface="맑은 고딕"/>
               </a:rPr>
               <a:t>오늘의 학습 목표</a:t>
             </a:r>
@@ -6095,6 +6149,8 @@
                   <a:srgbClr val="222733"/>
                 </a:solidFill>
                 <a:latin typeface="맑은 고딕"/>
+                <a:ea typeface="맑은 고딕"/>
+                <a:cs typeface="맑은 고딕"/>
               </a:rPr>
               <a:t>1.  컨테이너를 여러 개 운영할 때의 어려움을 이해한다</a:t>
             </a:r>
@@ -6111,6 +6167,8 @@
                   <a:srgbClr val="222733"/>
                 </a:solidFill>
                 <a:latin typeface="맑은 고딕"/>
+                <a:ea typeface="맑은 고딕"/>
+                <a:cs typeface="맑은 고딕"/>
               </a:rPr>
               <a:t>2.  Kubernetes(오케스트레이션)가 이 문제를 어떻게 해결하는지 이해한다</a:t>
             </a:r>
@@ -6127,6 +6185,8 @@
                   <a:srgbClr val="222733"/>
                 </a:solidFill>
                 <a:latin typeface="맑은 고딕"/>
+                <a:ea typeface="맑은 고딕"/>
+                <a:cs typeface="맑은 고딕"/>
               </a:rPr>
               <a:t>3.  K8s의 큰 그림(Control Plane vs Node)을 이해한다</a:t>
             </a:r>
@@ -6162,6 +6222,8 @@
                   <a:srgbClr val="5B6373"/>
                 </a:solidFill>
                 <a:latin typeface="맑은 고딕"/>
+                <a:ea typeface="맑은 고딕"/>
+                <a:cs typeface="맑은 고딕"/>
               </a:rPr>
               <a:t>클라우드인프라관리  ·  4주차 1차시</a:t>
             </a:r>
@@ -6197,6 +6259,8 @@
                   <a:srgbClr val="5B6373"/>
                 </a:solidFill>
                 <a:latin typeface="맑은 고딕"/>
+                <a:ea typeface="맑은 고딕"/>
+                <a:cs typeface="맑은 고딕"/>
               </a:rPr>
               <a:t>02 / 12</a:t>
             </a:r>
@@ -6382,6 +6446,8 @@
                   <a:srgbClr val="14B8A6"/>
                 </a:solidFill>
                 <a:latin typeface="맑은 고딕"/>
+                <a:ea typeface="맑은 고딕"/>
+                <a:cs typeface="맑은 고딕"/>
               </a:rPr>
               <a:t>SESSION OVERVIEW</a:t>
             </a:r>
@@ -6417,6 +6483,8 @@
                   <a:srgbClr val="FFFFFF"/>
                 </a:solidFill>
                 <a:latin typeface="맑은 고딕"/>
+                <a:ea typeface="맑은 고딕"/>
+                <a:cs typeface="맑은 고딕"/>
               </a:rPr>
               <a:t>오늘의 진행 순서</a:t>
             </a:r>
@@ -6628,6 +6696,8 @@
                   <a:srgbClr val="FFFFFF"/>
                 </a:solidFill>
                 <a:latin typeface="맑은 고딕"/>
+                <a:ea typeface="맑은 고딕"/>
+                <a:cs typeface="맑은 고딕"/>
               </a:rPr>
               <a:t>1</a:t>
             </a:r>
@@ -6711,6 +6781,8 @@
                   <a:srgbClr val="14213D"/>
                 </a:solidFill>
                 <a:latin typeface="맑은 고딕"/>
+                <a:ea typeface="맑은 고딕"/>
+                <a:cs typeface="맑은 고딕"/>
               </a:rPr>
               <a:t>개념 설명</a:t>
             </a:r>
@@ -6750,6 +6822,8 @@
                   <a:srgbClr val="222733"/>
                 </a:solidFill>
                 <a:latin typeface="맑은 고딕"/>
+                <a:ea typeface="맑은 고딕"/>
+                <a:cs typeface="맑은 고딕"/>
               </a:rPr>
               <a:t>강의자료 기반 직접 강의</a:t>
             </a:r>
@@ -6829,6 +6903,8 @@
                   <a:srgbClr val="FFFFFF"/>
                 </a:solidFill>
                 <a:latin typeface="맑은 고딕"/>
+                <a:ea typeface="맑은 고딕"/>
+                <a:cs typeface="맑은 고딕"/>
               </a:rPr>
               <a:t>2</a:t>
             </a:r>
@@ -6912,6 +6988,8 @@
                   <a:srgbClr val="14213D"/>
                 </a:solidFill>
                 <a:latin typeface="맑은 고딕"/>
+                <a:ea typeface="맑은 고딕"/>
+                <a:cs typeface="맑은 고딕"/>
               </a:rPr>
               <a:t>Killercoda</a:t>
             </a:r>
@@ -6951,6 +7029,8 @@
                   <a:srgbClr val="222733"/>
                 </a:solidFill>
                 <a:latin typeface="맑은 고딕"/>
+                <a:ea typeface="맑은 고딕"/>
+                <a:cs typeface="맑은 고딕"/>
               </a:rPr>
               <a:t>멀티노드 클러스터 첫 접속</a:t>
             </a:r>
@@ -7030,6 +7110,8 @@
                   <a:srgbClr val="FFFFFF"/>
                 </a:solidFill>
                 <a:latin typeface="맑은 고딕"/>
+                <a:ea typeface="맑은 고딕"/>
+                <a:cs typeface="맑은 고딕"/>
               </a:rPr>
               <a:t>3</a:t>
             </a:r>
@@ -7113,6 +7195,8 @@
                   <a:srgbClr val="14213D"/>
                 </a:solidFill>
                 <a:latin typeface="맑은 고딕"/>
+                <a:ea typeface="맑은 고딕"/>
+                <a:cs typeface="맑은 고딕"/>
               </a:rPr>
               <a:t>VM 안내</a:t>
             </a:r>
@@ -7152,6 +7236,8 @@
                   <a:srgbClr val="222733"/>
                 </a:solidFill>
                 <a:latin typeface="맑은 고딕"/>
+                <a:ea typeface="맑은 고딕"/>
+                <a:cs typeface="맑은 고딕"/>
               </a:rPr>
               <a:t>minikube 기동 안내</a:t>
             </a:r>
@@ -7231,6 +7317,8 @@
                   <a:srgbClr val="FFFFFF"/>
                 </a:solidFill>
                 <a:latin typeface="맑은 고딕"/>
+                <a:ea typeface="맑은 고딕"/>
+                <a:cs typeface="맑은 고딕"/>
               </a:rPr>
               <a:t>4</a:t>
             </a:r>
@@ -7314,6 +7402,8 @@
                   <a:srgbClr val="14213D"/>
                 </a:solidFill>
                 <a:latin typeface="맑은 고딕"/>
+                <a:ea typeface="맑은 고딕"/>
+                <a:cs typeface="맑은 고딕"/>
               </a:rPr>
               <a:t>결과 제출</a:t>
             </a:r>
@@ -7353,6 +7443,8 @@
                   <a:srgbClr val="222733"/>
                 </a:solidFill>
                 <a:latin typeface="맑은 고딕"/>
+                <a:ea typeface="맑은 고딕"/>
+                <a:cs typeface="맑은 고딕"/>
               </a:rPr>
               <a:t>체크리스트 제출</a:t>
             </a:r>
@@ -7388,6 +7480,8 @@
                   <a:srgbClr val="5B6373"/>
                 </a:solidFill>
                 <a:latin typeface="맑은 고딕"/>
+                <a:ea typeface="맑은 고딕"/>
+                <a:cs typeface="맑은 고딕"/>
               </a:rPr>
               <a:t>클라우드인프라관리  ·  4주차 1차시</a:t>
             </a:r>
@@ -7423,6 +7517,8 @@
                   <a:srgbClr val="5B6373"/>
                 </a:solidFill>
                 <a:latin typeface="맑은 고딕"/>
+                <a:ea typeface="맑은 고딕"/>
+                <a:cs typeface="맑은 고딕"/>
               </a:rPr>
               <a:t>03 / 12</a:t>
             </a:r>
@@ -7626,6 +7722,8 @@
                   <a:srgbClr val="14213D"/>
                 </a:solidFill>
                 <a:latin typeface="맑은 고딕"/>
+                <a:ea typeface="맑은 고딕"/>
+                <a:cs typeface="맑은 고딕"/>
               </a:rPr>
               <a:t>PART 01</a:t>
             </a:r>
@@ -7661,6 +7759,8 @@
                   <a:srgbClr val="FFFFFF"/>
                 </a:solidFill>
                 <a:latin typeface="맑은 고딕"/>
+                <a:ea typeface="맑은 고딕"/>
+                <a:cs typeface="맑은 고딕"/>
               </a:rPr>
               <a:t>왜 오케스트레이션이 필요한가</a:t>
             </a:r>
@@ -7696,6 +7796,8 @@
                   <a:srgbClr val="C9D3E6"/>
                 </a:solidFill>
                 <a:latin typeface="맑은 고딕"/>
+                <a:ea typeface="맑은 고딕"/>
+                <a:cs typeface="맑은 고딕"/>
               </a:rPr>
               <a:t>컨테이너가 100개라면?</a:t>
             </a:r>
@@ -7855,6 +7957,8 @@
                   <a:srgbClr val="14213D"/>
                 </a:solidFill>
                 <a:latin typeface="맑은 고딕"/>
+                <a:ea typeface="맑은 고딕"/>
+                <a:cs typeface="맑은 고딕"/>
               </a:rPr>
               <a:t>01</a:t>
             </a:r>
@@ -7890,6 +7994,8 @@
                   <a:srgbClr val="14B8A6"/>
                 </a:solidFill>
                 <a:latin typeface="맑은 고딕"/>
+                <a:ea typeface="맑은 고딕"/>
+                <a:cs typeface="맑은 고딕"/>
               </a:rPr>
               <a:t>PART 1 · 왜 오케스트레이션인가</a:t>
             </a:r>
@@ -7925,6 +8031,8 @@
                   <a:srgbClr val="FFFFFF"/>
                 </a:solidFill>
                 <a:latin typeface="맑은 고딕"/>
+                <a:ea typeface="맑은 고딕"/>
+                <a:cs typeface="맑은 고딕"/>
               </a:rPr>
               <a:t>컨테이너를 수동으로 관리한다면</a:t>
             </a:r>
@@ -7964,6 +8072,8 @@
                   <a:srgbClr val="0D9488"/>
                 </a:solidFill>
                 <a:latin typeface="맑은 고딕"/>
+                <a:ea typeface="맑은 고딕"/>
+                <a:cs typeface="맑은 고딕"/>
               </a:rPr>
               <a:t>●  </a:t>
             </a:r>
@@ -7973,6 +8083,8 @@
                   <a:srgbClr val="222733"/>
                 </a:solidFill>
                 <a:latin typeface="맑은 고딕"/>
+                <a:ea typeface="맑은 고딕"/>
+                <a:cs typeface="맑은 고딕"/>
               </a:rPr>
               <a:t>서버 여러 대에 컨테이너를 하나하나 docker run으로 배포</a:t>
             </a:r>
@@ -7989,6 +8101,8 @@
                   <a:srgbClr val="0D9488"/>
                 </a:solidFill>
                 <a:latin typeface="맑은 고딕"/>
+                <a:ea typeface="맑은 고딕"/>
+                <a:cs typeface="맑은 고딕"/>
               </a:rPr>
               <a:t>●  </a:t>
             </a:r>
@@ -7998,6 +8112,8 @@
                   <a:srgbClr val="222733"/>
                 </a:solidFill>
                 <a:latin typeface="맑은 고딕"/>
+                <a:ea typeface="맑은 고딕"/>
+                <a:cs typeface="맑은 고딕"/>
               </a:rPr>
               <a:t>컨테이너가 죽으면? 누군가 직접 확인하고 다시 실행해야 함</a:t>
             </a:r>
@@ -8014,6 +8130,8 @@
                   <a:srgbClr val="0D9488"/>
                 </a:solidFill>
                 <a:latin typeface="맑은 고딕"/>
+                <a:ea typeface="맑은 고딕"/>
+                <a:cs typeface="맑은 고딕"/>
               </a:rPr>
               <a:t>●  </a:t>
             </a:r>
@@ -8023,6 +8141,8 @@
                   <a:srgbClr val="222733"/>
                 </a:solidFill>
                 <a:latin typeface="맑은 고딕"/>
+                <a:ea typeface="맑은 고딕"/>
+                <a:cs typeface="맑은 고딕"/>
               </a:rPr>
               <a:t>트래픽이 몰리면? 직접 컨테이너 개수를 늘려야 함</a:t>
             </a:r>
@@ -8039,6 +8159,8 @@
                   <a:srgbClr val="0D9488"/>
                 </a:solidFill>
                 <a:latin typeface="맑은 고딕"/>
+                <a:ea typeface="맑은 고딕"/>
+                <a:cs typeface="맑은 고딕"/>
               </a:rPr>
               <a:t>●  </a:t>
             </a:r>
@@ -8048,6 +8170,8 @@
                   <a:srgbClr val="222733"/>
                 </a:solidFill>
                 <a:latin typeface="맑은 고딕"/>
+                <a:ea typeface="맑은 고딕"/>
+                <a:cs typeface="맑은 고딕"/>
               </a:rPr>
               <a:t>서버 한 대가 고장나면? 그 위 컨테이너를 다른 서버로 직접 옮겨야 함</a:t>
             </a:r>
@@ -8127,6 +8251,8 @@
                   <a:srgbClr val="FFFFFF"/>
                 </a:solidFill>
                 <a:latin typeface="맑은 고딕"/>
+                <a:ea typeface="맑은 고딕"/>
+                <a:cs typeface="맑은 고딕"/>
               </a:rPr>
               <a:t>😰  컨테이너가 수십·수백 개라면?</a:t>
             </a:r>
@@ -8162,6 +8288,8 @@
                   <a:srgbClr val="FFFFFF"/>
                 </a:solidFill>
                 <a:latin typeface="맑은 고딕"/>
+                <a:ea typeface="맑은 고딕"/>
+                <a:cs typeface="맑은 고딕"/>
               </a:rPr>
               <a:t>사람이 손으로 관리하는 건 불가능하다 — 그래서 '자동으로' 관리해주는 도구가 필요하다</a:t>
             </a:r>
@@ -8197,6 +8325,8 @@
                   <a:srgbClr val="5B6373"/>
                 </a:solidFill>
                 <a:latin typeface="맑은 고딕"/>
+                <a:ea typeface="맑은 고딕"/>
+                <a:cs typeface="맑은 고딕"/>
               </a:rPr>
               <a:t>클라우드인프라관리  ·  4주차 1차시</a:t>
             </a:r>
@@ -8232,6 +8362,8 @@
                   <a:srgbClr val="5B6373"/>
                 </a:solidFill>
                 <a:latin typeface="맑은 고딕"/>
+                <a:ea typeface="맑은 고딕"/>
+                <a:cs typeface="맑은 고딕"/>
               </a:rPr>
               <a:t>05 / 12</a:t>
             </a:r>
@@ -8435,6 +8567,8 @@
                   <a:srgbClr val="14213D"/>
                 </a:solidFill>
                 <a:latin typeface="맑은 고딕"/>
+                <a:ea typeface="맑은 고딕"/>
+                <a:cs typeface="맑은 고딕"/>
               </a:rPr>
               <a:t>01</a:t>
             </a:r>
@@ -8470,6 +8604,8 @@
                   <a:srgbClr val="14B8A6"/>
                 </a:solidFill>
                 <a:latin typeface="맑은 고딕"/>
+                <a:ea typeface="맑은 고딕"/>
+                <a:cs typeface="맑은 고딕"/>
               </a:rPr>
               <a:t>PART 1 · 왜 오케스트레이션인가</a:t>
             </a:r>
@@ -8505,6 +8641,8 @@
                   <a:srgbClr val="FFFFFF"/>
                 </a:solidFill>
                 <a:latin typeface="맑은 고딕"/>
+                <a:ea typeface="맑은 고딕"/>
+                <a:cs typeface="맑은 고딕"/>
               </a:rPr>
               <a:t>Kubernetes란?</a:t>
             </a:r>
@@ -8544,6 +8682,8 @@
                   <a:srgbClr val="0D9488"/>
                 </a:solidFill>
                 <a:latin typeface="맑은 고딕"/>
+                <a:ea typeface="맑은 고딕"/>
+                <a:cs typeface="맑은 고딕"/>
               </a:rPr>
               <a:t>●  </a:t>
             </a:r>
@@ -8553,6 +8693,8 @@
                   <a:srgbClr val="222733"/>
                 </a:solidFill>
                 <a:latin typeface="맑은 고딕"/>
+                <a:ea typeface="맑은 고딕"/>
+                <a:cs typeface="맑은 고딕"/>
               </a:rPr>
               <a:t>여러 대의 서버(노드)에 걸쳐 컨테이너를 자동으로 배포·관리하는 오케스트레이션 도구</a:t>
             </a:r>
@@ -8569,6 +8711,8 @@
                   <a:srgbClr val="0D9488"/>
                 </a:solidFill>
                 <a:latin typeface="맑은 고딕"/>
+                <a:ea typeface="맑은 고딕"/>
+                <a:cs typeface="맑은 고딕"/>
               </a:rPr>
               <a:t>●  </a:t>
             </a:r>
@@ -8578,6 +8722,8 @@
                   <a:srgbClr val="222733"/>
                 </a:solidFill>
                 <a:latin typeface="맑은 고딕"/>
+                <a:ea typeface="맑은 고딕"/>
+                <a:cs typeface="맑은 고딕"/>
               </a:rPr>
               <a:t>"몇 개가 떠 있어야 한다"를 선언하면, K8s가 실제로 그 상태를 유지해줌</a:t>
             </a:r>
@@ -8594,6 +8740,8 @@
                   <a:srgbClr val="0D9488"/>
                 </a:solidFill>
                 <a:latin typeface="맑은 고딕"/>
+                <a:ea typeface="맑은 고딕"/>
+                <a:cs typeface="맑은 고딕"/>
               </a:rPr>
               <a:t>●  </a:t>
             </a:r>
@@ -8603,6 +8751,8 @@
                   <a:srgbClr val="222733"/>
                 </a:solidFill>
                 <a:latin typeface="맑은 고딕"/>
+                <a:ea typeface="맑은 고딕"/>
+                <a:cs typeface="맑은 고딕"/>
               </a:rPr>
               <a:t>컨테이너가 죽으면 자동으로 다시 띄우고(자가치유), 트래픽에 맞춰 개수를 조절(오토스케일링)</a:t>
             </a:r>
@@ -8619,6 +8769,8 @@
                   <a:srgbClr val="0D9488"/>
                 </a:solidFill>
                 <a:latin typeface="맑은 고딕"/>
+                <a:ea typeface="맑은 고딕"/>
+                <a:cs typeface="맑은 고딕"/>
               </a:rPr>
               <a:t>●  </a:t>
             </a:r>
@@ -8628,6 +8780,8 @@
                   <a:srgbClr val="222733"/>
                 </a:solidFill>
                 <a:latin typeface="맑은 고딕"/>
+                <a:ea typeface="맑은 고딕"/>
+                <a:cs typeface="맑은 고딕"/>
               </a:rPr>
               <a:t>구글이 사내에서 쓰던 시스템을 오픈소스로 공개한 것이 시초</a:t>
             </a:r>
@@ -8663,6 +8817,8 @@
                   <a:srgbClr val="5B6373"/>
                 </a:solidFill>
                 <a:latin typeface="맑은 고딕"/>
+                <a:ea typeface="맑은 고딕"/>
+                <a:cs typeface="맑은 고딕"/>
               </a:rPr>
               <a:t>클라우드인프라관리  ·  4주차 1차시</a:t>
             </a:r>
@@ -8698,6 +8854,8 @@
                   <a:srgbClr val="5B6373"/>
                 </a:solidFill>
                 <a:latin typeface="맑은 고딕"/>
+                <a:ea typeface="맑은 고딕"/>
+                <a:cs typeface="맑은 고딕"/>
               </a:rPr>
               <a:t>06 / 12</a:t>
             </a:r>
@@ -8901,6 +9059,8 @@
                   <a:srgbClr val="14213D"/>
                 </a:solidFill>
                 <a:latin typeface="맑은 고딕"/>
+                <a:ea typeface="맑은 고딕"/>
+                <a:cs typeface="맑은 고딕"/>
               </a:rPr>
               <a:t>PART 02</a:t>
             </a:r>
@@ -8936,6 +9096,8 @@
                   <a:srgbClr val="FFFFFF"/>
                 </a:solidFill>
                 <a:latin typeface="맑은 고딕"/>
+                <a:ea typeface="맑은 고딕"/>
+                <a:cs typeface="맑은 고딕"/>
               </a:rPr>
               <a:t>K8s 아키텍처 개관</a:t>
             </a:r>
@@ -8971,6 +9133,8 @@
                   <a:srgbClr val="C9D3E6"/>
                 </a:solidFill>
                 <a:latin typeface="맑은 고딕"/>
+                <a:ea typeface="맑은 고딕"/>
+                <a:cs typeface="맑은 고딕"/>
               </a:rPr>
               <a:t>Control Plane과 Node</a:t>
             </a:r>
@@ -9130,6 +9294,8 @@
                   <a:srgbClr val="14213D"/>
                 </a:solidFill>
                 <a:latin typeface="맑은 고딕"/>
+                <a:ea typeface="맑은 고딕"/>
+                <a:cs typeface="맑은 고딕"/>
               </a:rPr>
               <a:t>02</a:t>
             </a:r>
@@ -9165,6 +9331,8 @@
                   <a:srgbClr val="14B8A6"/>
                 </a:solidFill>
                 <a:latin typeface="맑은 고딕"/>
+                <a:ea typeface="맑은 고딕"/>
+                <a:cs typeface="맑은 고딕"/>
               </a:rPr>
               <a:t>PART 2 · K8s 아키텍처</a:t>
             </a:r>
@@ -9200,6 +9368,8 @@
                   <a:srgbClr val="FFFFFF"/>
                 </a:solidFill>
                 <a:latin typeface="맑은 고딕"/>
+                <a:ea typeface="맑은 고딕"/>
+                <a:cs typeface="맑은 고딕"/>
               </a:rPr>
               <a:t>클러스터의 큰 그림</a:t>
             </a:r>
@@ -9239,6 +9409,8 @@
                   <a:srgbClr val="0D9488"/>
                 </a:solidFill>
                 <a:latin typeface="맑은 고딕"/>
+                <a:ea typeface="맑은 고딕"/>
+                <a:cs typeface="맑은 고딕"/>
               </a:rPr>
               <a:t>●  </a:t>
             </a:r>
@@ -9248,6 +9420,8 @@
                   <a:srgbClr val="222733"/>
                 </a:solidFill>
                 <a:latin typeface="맑은 고딕"/>
+                <a:ea typeface="맑은 고딕"/>
+                <a:cs typeface="맑은 고딕"/>
               </a:rPr>
               <a:t>클러스터 = 여러 대의 서버(노드)를 하나로 묶은 것</a:t>
             </a:r>
@@ -9264,6 +9438,8 @@
                   <a:srgbClr val="0D9488"/>
                 </a:solidFill>
                 <a:latin typeface="맑은 고딕"/>
+                <a:ea typeface="맑은 고딕"/>
+                <a:cs typeface="맑은 고딕"/>
               </a:rPr>
               <a:t>●  </a:t>
             </a:r>
@@ -9273,6 +9449,8 @@
                   <a:srgbClr val="222733"/>
                 </a:solidFill>
                 <a:latin typeface="맑은 고딕"/>
+                <a:ea typeface="맑은 고딕"/>
+                <a:cs typeface="맑은 고딕"/>
               </a:rPr>
               <a:t>Control Plane = 클러스터 전체를 지휘하는 '두뇌'</a:t>
             </a:r>
@@ -9289,6 +9467,8 @@
                   <a:srgbClr val="0D9488"/>
                 </a:solidFill>
                 <a:latin typeface="맑은 고딕"/>
+                <a:ea typeface="맑은 고딕"/>
+                <a:cs typeface="맑은 고딕"/>
               </a:rPr>
               <a:t>●  </a:t>
             </a:r>
@@ -9298,6 +9478,8 @@
                   <a:srgbClr val="222733"/>
                 </a:solidFill>
                 <a:latin typeface="맑은 고딕"/>
+                <a:ea typeface="맑은 고딕"/>
+                <a:cs typeface="맑은 고딕"/>
               </a:rPr>
               <a:t>Worker Node = 실제로 컨테이너(Pod)가 돌아가는 '일꾼'</a:t>
             </a:r>
@@ -9314,6 +9496,8 @@
                   <a:srgbClr val="0D9488"/>
                 </a:solidFill>
                 <a:latin typeface="맑은 고딕"/>
+                <a:ea typeface="맑은 고딕"/>
+                <a:cs typeface="맑은 고딕"/>
               </a:rPr>
               <a:t>●  </a:t>
             </a:r>
@@ -9323,6 +9507,8 @@
                   <a:srgbClr val="222733"/>
                 </a:solidFill>
                 <a:latin typeface="맑은 고딕"/>
+                <a:ea typeface="맑은 고딕"/>
+                <a:cs typeface="맑은 고딕"/>
               </a:rPr>
               <a:t>우리는 minikube로 이 클러스터 전체를 내 VM 한 대 안에 압축해서 씀</a:t>
             </a:r>
@@ -9358,6 +9544,8 @@
                   <a:srgbClr val="14213D"/>
                 </a:solidFill>
                 <a:latin typeface="맑은 고딕"/>
+                <a:ea typeface="맑은 고딕"/>
+                <a:cs typeface="맑은 고딕"/>
               </a:rPr>
               <a:t>클러스터 구조</a:t>
             </a:r>
@@ -9437,6 +9625,8 @@
                   <a:srgbClr val="FFFFFF"/>
                 </a:solidFill>
                 <a:latin typeface="맑은 고딕"/>
+                <a:ea typeface="맑은 고딕"/>
+                <a:cs typeface="맑은 고딕"/>
               </a:rPr>
               <a:t>Control Plane (두뇌) — API Server · Scheduler · etcd</a:t>
             </a:r>
@@ -9516,6 +9706,8 @@
                   <a:srgbClr val="FFFFFF"/>
                 </a:solidFill>
                 <a:latin typeface="맑은 고딕"/>
+                <a:ea typeface="맑은 고딕"/>
+                <a:cs typeface="맑은 고딕"/>
               </a:rPr>
               <a:t>Worker Node 1 (일꾼)</a:t>
             </a:r>
@@ -9595,6 +9787,8 @@
                   <a:srgbClr val="FFFFFF"/>
                 </a:solidFill>
                 <a:latin typeface="맑은 고딕"/>
+                <a:ea typeface="맑은 고딕"/>
+                <a:cs typeface="맑은 고딕"/>
               </a:rPr>
               <a:t>Worker Node 2 (일꾼)</a:t>
             </a:r>
@@ -9630,6 +9824,8 @@
                   <a:srgbClr val="5B6373"/>
                 </a:solidFill>
                 <a:latin typeface="맑은 고딕"/>
+                <a:ea typeface="맑은 고딕"/>
+                <a:cs typeface="맑은 고딕"/>
               </a:rPr>
               <a:t>클라우드인프라관리  ·  4주차 1차시</a:t>
             </a:r>
@@ -9665,6 +9861,8 @@
                   <a:srgbClr val="5B6373"/>
                 </a:solidFill>
                 <a:latin typeface="맑은 고딕"/>
+                <a:ea typeface="맑은 고딕"/>
+                <a:cs typeface="맑은 고딕"/>
               </a:rPr>
               <a:t>08 / 12</a:t>
             </a:r>
@@ -9868,6 +10066,8 @@
                   <a:srgbClr val="14213D"/>
                 </a:solidFill>
                 <a:latin typeface="맑은 고딕"/>
+                <a:ea typeface="맑은 고딕"/>
+                <a:cs typeface="맑은 고딕"/>
               </a:rPr>
               <a:t>03</a:t>
             </a:r>
@@ -9903,6 +10103,8 @@
                   <a:srgbClr val="14B8A6"/>
                 </a:solidFill>
                 <a:latin typeface="맑은 고딕"/>
+                <a:ea typeface="맑은 고딕"/>
+                <a:cs typeface="맑은 고딕"/>
               </a:rPr>
               <a:t>실습 안내</a:t>
             </a:r>
@@ -9938,6 +10140,8 @@
                   <a:srgbClr val="FFFFFF"/>
                 </a:solidFill>
                 <a:latin typeface="맑은 고딕"/>
+                <a:ea typeface="맑은 고딕"/>
+                <a:cs typeface="맑은 고딕"/>
               </a:rPr>
               <a:t>Killercoda — 클러스터 첫 접속</a:t>
             </a:r>
@@ -9977,6 +10181,8 @@
                   <a:srgbClr val="0D9488"/>
                 </a:solidFill>
                 <a:latin typeface="맑은 고딕"/>
+                <a:ea typeface="맑은 고딕"/>
+                <a:cs typeface="맑은 고딕"/>
               </a:rPr>
               <a:t>●  </a:t>
             </a:r>
@@ -9986,6 +10192,8 @@
                   <a:srgbClr val="222733"/>
                 </a:solidFill>
                 <a:latin typeface="맑은 고딕"/>
+                <a:ea typeface="맑은 고딕"/>
+                <a:cs typeface="맑은 고딕"/>
               </a:rPr>
               <a:t>교수자가 미리 구동해 둔 멀티노드 K8s 클러스터에 접속</a:t>
             </a:r>
@@ -10002,6 +10210,8 @@
                   <a:srgbClr val="0D9488"/>
                 </a:solidFill>
                 <a:latin typeface="맑은 고딕"/>
+                <a:ea typeface="맑은 고딕"/>
+                <a:cs typeface="맑은 고딕"/>
               </a:rPr>
               <a:t>●  </a:t>
             </a:r>
@@ -10011,6 +10221,8 @@
                   <a:srgbClr val="222733"/>
                 </a:solidFill>
                 <a:latin typeface="맑은 고딕"/>
+                <a:ea typeface="맑은 고딕"/>
+                <a:cs typeface="맑은 고딕"/>
               </a:rPr>
               <a:t>kubectl get nodes  — 클러스터에 어떤 노드들이 있는지 확인</a:t>
             </a:r>
@@ -10027,6 +10239,8 @@
                   <a:srgbClr val="0D9488"/>
                 </a:solidFill>
                 <a:latin typeface="맑은 고딕"/>
+                <a:ea typeface="맑은 고딕"/>
+                <a:cs typeface="맑은 고딕"/>
               </a:rPr>
               <a:t>●  </a:t>
             </a:r>
@@ -10036,6 +10250,8 @@
                   <a:srgbClr val="222733"/>
                 </a:solidFill>
                 <a:latin typeface="맑은 고딕"/>
+                <a:ea typeface="맑은 고딕"/>
+                <a:cs typeface="맑은 고딕"/>
               </a:rPr>
               <a:t>kubectl cluster-info  — Control Plane 주소 확인</a:t>
             </a:r>
@@ -10052,6 +10268,8 @@
                   <a:srgbClr val="0D9488"/>
                 </a:solidFill>
                 <a:latin typeface="맑은 고딕"/>
+                <a:ea typeface="맑은 고딕"/>
+                <a:cs typeface="맑은 고딕"/>
               </a:rPr>
               <a:t>●  </a:t>
             </a:r>
@@ -10061,6 +10279,8 @@
                   <a:srgbClr val="222733"/>
                 </a:solidFill>
                 <a:latin typeface="맑은 고딕"/>
+                <a:ea typeface="맑은 고딕"/>
+                <a:cs typeface="맑은 고딕"/>
               </a:rPr>
               <a:t>지금은 명령어 결과를 눈으로 보는 것이 목표, 세부 문법은 다음 차시부터</a:t>
             </a:r>
@@ -10096,6 +10316,8 @@
                   <a:srgbClr val="5B6373"/>
                 </a:solidFill>
                 <a:latin typeface="맑은 고딕"/>
+                <a:ea typeface="맑은 고딕"/>
+                <a:cs typeface="맑은 고딕"/>
               </a:rPr>
               <a:t>클라우드인프라관리  ·  4주차 1차시</a:t>
             </a:r>
@@ -10131,6 +10353,8 @@
                   <a:srgbClr val="5B6373"/>
                 </a:solidFill>
                 <a:latin typeface="맑은 고딕"/>
+                <a:ea typeface="맑은 고딕"/>
+                <a:cs typeface="맑은 고딕"/>
               </a:rPr>
               <a:t>09 / 12</a:t>
             </a:r>
